--- a/Parallel_Feedforward_Network_Presentation.pptx
+++ b/Parallel_Feedforward_Network_Presentation.pptx
@@ -8254,7 +8254,7 @@
             <a:tbl>
               <a:tblPr>
                 <a:noFill/>
-                <a:tableStyleId>{D09011A5-49AC-419F-A634-65DB9785C07A}</a:tableStyleId>
+                <a:tableStyleId>{AA8A888A-C509-4ABF-AF4A-2C54486FE38D}</a:tableStyleId>
               </a:tblPr>
               <a:tblGrid>
                 <a:gridCol w="2571750"/>
@@ -9198,7 +9198,7 @@
             <a:tbl>
               <a:tblPr>
                 <a:noFill/>
-                <a:tableStyleId>{D09011A5-49AC-419F-A634-65DB9785C07A}</a:tableStyleId>
+                <a:tableStyleId>{AA8A888A-C509-4ABF-AF4A-2C54486FE38D}</a:tableStyleId>
               </a:tblPr>
               <a:tblGrid>
                 <a:gridCol w="2571750"/>
@@ -23138,39 +23138,36 @@
               <a:buNone/>
             </a:pPr>
             <a:r>
-              <a:rPr b="0" i="0" lang="en-US" sz="1350" u="none" cap="none" strike="noStrike">
-                <a:solidFill>
-                  <a:srgbClr val="5B616B"/>
-                </a:solidFill>
-                <a:latin typeface="Helvetica Neue"/>
-                <a:ea typeface="Helvetica Neue"/>
-                <a:cs typeface="Helvetica Neue"/>
-                <a:sym typeface="Helvetica Neue"/>
-              </a:rPr>
-              <a:t>Apply 0.5 / Bglobal × G.</a:t>
-            </a:r>
-            <a:br>
-              <a:rPr b="0" i="0" lang="en-US" sz="1350" u="none" cap="none" strike="noStrike">
-                <a:solidFill>
-                  <a:srgbClr val="5B616B"/>
-                </a:solidFill>
-                <a:latin typeface="Helvetica Neue"/>
-                <a:ea typeface="Helvetica Neue"/>
-                <a:cs typeface="Helvetica Neue"/>
-                <a:sym typeface="Helvetica Neue"/>
-              </a:rPr>
-            </a:br>
-            <a:br>
-              <a:rPr b="0" i="0" lang="en-US" sz="1350" u="none" cap="none" strike="noStrike">
-                <a:solidFill>
-                  <a:srgbClr val="5B616B"/>
-                </a:solidFill>
-                <a:latin typeface="Helvetica Neue"/>
-                <a:ea typeface="Helvetica Neue"/>
-                <a:cs typeface="Helvetica Neue"/>
-                <a:sym typeface="Helvetica Neue"/>
-              </a:rPr>
-            </a:br>
+              <a:t/>
+            </a:r>
+            <a:endParaRPr sz="1350">
+              <a:solidFill>
+                <a:srgbClr val="5B616B"/>
+              </a:solidFill>
+              <a:latin typeface="Helvetica Neue"/>
+              <a:ea typeface="Helvetica Neue"/>
+              <a:cs typeface="Helvetica Neue"/>
+              <a:sym typeface="Helvetica Neue"/>
+            </a:endParaRPr>
+          </a:p>
+          <a:p>
+            <a:pPr indent="0" lvl="0" marL="0" marR="0" rtl="0" algn="l">
+              <a:lnSpc>
+                <a:spcPct val="112000"/>
+              </a:lnSpc>
+              <a:spcBef>
+                <a:spcPts val="850"/>
+              </a:spcBef>
+              <a:spcAft>
+                <a:spcPts val="0"/>
+              </a:spcAft>
+              <a:buClr>
+                <a:srgbClr val="5B616B"/>
+              </a:buClr>
+              <a:buSzPts val="1350"/>
+              <a:buFont typeface="Helvetica Neue"/>
+              <a:buNone/>
+            </a:pPr>
             <a:r>
               <a:rPr b="0" i="0" lang="en-US" sz="1350" u="none" cap="none" strike="noStrike">
                 <a:solidFill>

--- a/Parallel_Feedforward_Network_Presentation.pptx
+++ b/Parallel_Feedforward_Network_Presentation.pptx
@@ -8254,7 +8254,7 @@
             <a:tbl>
               <a:tblPr>
                 <a:noFill/>
-                <a:tableStyleId>{AA8A888A-C509-4ABF-AF4A-2C54486FE38D}</a:tableStyleId>
+                <a:tableStyleId>{8A91943F-CF74-4FE7-8ED7-1DBE6B88E614}</a:tableStyleId>
               </a:tblPr>
               <a:tblGrid>
                 <a:gridCol w="2571750"/>
@@ -9198,7 +9198,7 @@
             <a:tbl>
               <a:tblPr>
                 <a:noFill/>
-                <a:tableStyleId>{AA8A888A-C509-4ABF-AF4A-2C54486FE38D}</a:tableStyleId>
+                <a:tableStyleId>{8A91943F-CF74-4FE7-8ED7-1DBE6B88E614}</a:tableStyleId>
               </a:tblPr>
               <a:tblGrid>
                 <a:gridCol w="2571750"/>
@@ -16056,41 +16056,33 @@
               <a:buNone/>
             </a:pPr>
             <a:r>
-              <a:rPr b="1" i="0" lang="en-US" sz="5100" u="none" cap="none" strike="noStrike">
-                <a:solidFill>
-                  <a:srgbClr val="000000"/>
-                </a:solidFill>
+              <a:rPr b="1" lang="en-US" sz="3900">
                 <a:latin typeface="Helvetica Neue"/>
                 <a:ea typeface="Helvetica Neue"/>
                 <a:cs typeface="Helvetica Neue"/>
                 <a:sym typeface="Helvetica Neue"/>
               </a:rPr>
-              <a:t>Define the work before</a:t>
-            </a:r>
-            <a:br>
-              <a:rPr b="1" i="0" lang="en-US" sz="5100" u="none" cap="none" strike="noStrike">
-                <a:solidFill>
-                  <a:srgbClr val="000000"/>
-                </a:solidFill>
+              <a:t>The locality provided by tiling leads to speedup, which can be furthered </a:t>
+            </a:r>
+            <a:r>
+              <a:rPr b="1" lang="en-US" sz="3900">
                 <a:latin typeface="Helvetica Neue"/>
                 <a:ea typeface="Helvetica Neue"/>
                 <a:cs typeface="Helvetica Neue"/>
                 <a:sym typeface="Helvetica Neue"/>
               </a:rPr>
-            </a:br>
-            <a:r>
-              <a:rPr b="1" i="0" lang="en-US" sz="5100" u="none" cap="none" strike="noStrike">
-                <a:solidFill>
-                  <a:srgbClr val="000000"/>
-                </a:solidFill>
+              <a:t>through</a:t>
+            </a:r>
+            <a:r>
+              <a:rPr b="1" lang="en-US" sz="3900">
                 <a:latin typeface="Helvetica Neue"/>
                 <a:ea typeface="Helvetica Neue"/>
                 <a:cs typeface="Helvetica Neue"/>
                 <a:sym typeface="Helvetica Neue"/>
               </a:rPr>
-              <a:t>reading the speedup</a:t>
-            </a:r>
-            <a:endParaRPr b="0" i="0" sz="1400" u="none" cap="none" strike="noStrike">
+              <a:t> multi-threading</a:t>
+            </a:r>
+            <a:endParaRPr b="0" i="0" sz="200" u="none" cap="none" strike="noStrike">
               <a:solidFill>
                 <a:srgbClr val="000000"/>
               </a:solidFill>
